--- a/media/resources/files/Onduktar_Boluu_KondumA_6gdTPx2.pptx
+++ b/media/resources/files/Onduktar_Boluu_KondumA_6gdTPx2.pptx
@@ -8138,7 +8138,7 @@
               <a:pPr algn="ctr"/>
               <a:r>
                 <a:rPr lang="en-GB" sz="1200" dirty="0"/>
-                <a:t>2 ÷ 0.5 =  </a:t>
+                <a:t>2 ÷ 0,5 =  </a:t>
               </a:r>
             </a:p>
           </p:txBody>
@@ -8527,7 +8527,7 @@
             <a:pPr algn="ctr"/>
             <a:r>
               <a:rPr lang="en-GB" sz="1200" dirty="0"/>
-              <a:t>3 ÷ 0.5 =  </a:t>
+              <a:t>3 ÷ 0,5 =  </a:t>
             </a:r>
           </a:p>
         </p:txBody>
@@ -8864,7 +8864,7 @@
             <a:pPr algn="ctr"/>
             <a:r>
               <a:rPr lang="en-GB" sz="1200" dirty="0"/>
-              <a:t>5 ÷ 0.5 =  </a:t>
+              <a:t>5 ÷ 0,5 =  </a:t>
             </a:r>
           </a:p>
         </p:txBody>
@@ -9286,7 +9286,7 @@
             <a:pPr algn="ctr"/>
             <a:r>
               <a:rPr lang="en-GB" sz="1200" dirty="0"/>
-              <a:t>2.5 ÷ 0.5 =  </a:t>
+              <a:t>2,5 ÷ 0,5 =  </a:t>
             </a:r>
           </a:p>
         </p:txBody>
@@ -9577,7 +9577,7 @@
             <a:pPr algn="ctr"/>
             <a:r>
               <a:rPr lang="en-GB" sz="1200" dirty="0"/>
-              <a:t>0.5 ÷ 0.5 =  </a:t>
+              <a:t>0,5 ÷ 0,5 =  </a:t>
             </a:r>
           </a:p>
         </p:txBody>
@@ -9783,7 +9783,7 @@
                 <a:ea typeface="+mn-ea"/>
                 <a:cs typeface="+mn-cs"/>
               </a:rPr>
-              <a:t>7 ÷ 0.5 =  </a:t>
+              <a:t>7 ÷ 0,5 =  </a:t>
             </a:r>
           </a:p>
         </p:txBody>
@@ -9868,7 +9868,7 @@
                 <a:ea typeface="+mn-ea"/>
                 <a:cs typeface="+mn-cs"/>
               </a:rPr>
-              <a:t>20 ÷ 0.5 =  </a:t>
+              <a:t>20 ÷ 0,5 =  </a:t>
             </a:r>
           </a:p>
         </p:txBody>
@@ -9952,7 +9952,7 @@
             <a:pPr algn="ctr"/>
             <a:r>
               <a:rPr lang="en-GB" sz="1200" dirty="0"/>
-              <a:t>3 ÷ 0.2 =  </a:t>
+              <a:t>3 ÷ 0,2 =  </a:t>
             </a:r>
           </a:p>
         </p:txBody>
@@ -10243,7 +10243,7 @@
             <a:pPr algn="ctr"/>
             <a:r>
               <a:rPr lang="en-GB" sz="1200" dirty="0"/>
-              <a:t>4 ÷ 0.2 =  </a:t>
+              <a:t>4 ÷ 0,2 =  </a:t>
             </a:r>
           </a:p>
         </p:txBody>
@@ -10601,7 +10601,7 @@
             <a:pPr algn="ctr"/>
             <a:r>
               <a:rPr lang="en-GB" sz="1200" dirty="0"/>
-              <a:t>2 ÷ 0.1 =  </a:t>
+              <a:t>2 ÷ 0,1 =  </a:t>
             </a:r>
           </a:p>
         </p:txBody>
@@ -10755,7 +10755,7 @@
             <a:pPr algn="ctr"/>
             <a:r>
               <a:rPr lang="en-GB" sz="1200" dirty="0"/>
-              <a:t>5 ÷ 0.1 =  </a:t>
+              <a:t>5 ÷ 0,1 =  </a:t>
             </a:r>
           </a:p>
         </p:txBody>
@@ -11341,7 +11341,7 @@
                 <a:ea typeface="+mn-ea"/>
                 <a:cs typeface="+mn-cs"/>
               </a:rPr>
-              <a:t>9 ÷ 0.5 =  </a:t>
+              <a:t>9 ÷ 0,5 =  </a:t>
             </a:r>
           </a:p>
         </p:txBody>
@@ -11655,7 +11655,7 @@
                 <a:ea typeface="+mn-ea"/>
                 <a:cs typeface="+mn-cs"/>
               </a:rPr>
-              <a:t>6 ÷ 0.2 =  </a:t>
+              <a:t>6 ÷ 0,2 =  </a:t>
             </a:r>
           </a:p>
         </p:txBody>
@@ -11740,7 +11740,7 @@
                 <a:ea typeface="+mn-ea"/>
                 <a:cs typeface="+mn-cs"/>
               </a:rPr>
-              <a:t>2 ÷ 0.25 =  </a:t>
+              <a:t>2 ÷ 0,25 =  </a:t>
             </a:r>
           </a:p>
         </p:txBody>
@@ -11825,7 +11825,7 @@
                 <a:ea typeface="+mn-ea"/>
                 <a:cs typeface="+mn-cs"/>
               </a:rPr>
-              <a:t>14 ÷ 0.1 =  </a:t>
+              <a:t>14 ÷ 0,1 =  </a:t>
             </a:r>
           </a:p>
         </p:txBody>
@@ -11910,7 +11910,7 @@
                 <a:ea typeface="+mn-ea"/>
                 <a:cs typeface="+mn-cs"/>
               </a:rPr>
-              <a:t>5 ÷ 0.02 =  </a:t>
+              <a:t>5 ÷ 0,02 =  </a:t>
             </a:r>
           </a:p>
         </p:txBody>
@@ -12047,7 +12047,7 @@
               <a:pPr algn="ctr"/>
               <a:r>
                 <a:rPr lang="en-GB" sz="1200" dirty="0"/>
-                <a:t>2 ÷ 0.5 =  </a:t>
+                <a:t>2 ÷ 0,5 =  </a:t>
               </a:r>
             </a:p>
           </p:txBody>
@@ -12436,7 +12436,7 @@
             <a:pPr algn="ctr"/>
             <a:r>
               <a:rPr lang="en-GB" sz="1200" dirty="0"/>
-              <a:t>3 ÷ 0.5 =  </a:t>
+              <a:t>3 ÷ 0,5 =  </a:t>
             </a:r>
           </a:p>
         </p:txBody>
@@ -12816,7 +12816,7 @@
             <a:pPr algn="ctr"/>
             <a:r>
               <a:rPr lang="en-GB" sz="1200" dirty="0"/>
-              <a:t>5 ÷ 0.5 =  </a:t>
+              <a:t>5 ÷ 0,5 =  </a:t>
             </a:r>
           </a:p>
         </p:txBody>
@@ -13281,7 +13281,7 @@
             <a:pPr algn="ctr"/>
             <a:r>
               <a:rPr lang="en-GB" sz="1200" dirty="0"/>
-              <a:t>2.5 ÷ 0.5 =  </a:t>
+              <a:t>2,5 ÷ 0,5 =  </a:t>
             </a:r>
           </a:p>
         </p:txBody>
@@ -13615,7 +13615,7 @@
             <a:pPr algn="ctr"/>
             <a:r>
               <a:rPr lang="en-GB" sz="1200" dirty="0"/>
-              <a:t>0.5 ÷ 0.5 =  </a:t>
+              <a:t>0,5 ÷ 0,5 =  </a:t>
             </a:r>
           </a:p>
         </p:txBody>
@@ -13864,7 +13864,7 @@
                 <a:ea typeface="+mn-ea"/>
                 <a:cs typeface="+mn-cs"/>
               </a:rPr>
-              <a:t>7 ÷ 0.5 =  </a:t>
+              <a:t>7 ÷ 0,5 =  </a:t>
             </a:r>
           </a:p>
         </p:txBody>
@@ -13949,7 +13949,7 @@
                 <a:ea typeface="+mn-ea"/>
                 <a:cs typeface="+mn-cs"/>
               </a:rPr>
-              <a:t>20 ÷ 0.5 =  </a:t>
+              <a:t>20 ÷ 0,5 =  </a:t>
             </a:r>
           </a:p>
         </p:txBody>
@@ -14119,7 +14119,7 @@
             <a:pPr algn="ctr"/>
             <a:r>
               <a:rPr lang="en-GB" sz="1200" dirty="0"/>
-              <a:t>3 ÷ 0.2 =  </a:t>
+              <a:t>3 ÷ 0,2 =  </a:t>
             </a:r>
           </a:p>
         </p:txBody>
@@ -14410,7 +14410,7 @@
             <a:pPr algn="ctr"/>
             <a:r>
               <a:rPr lang="en-GB" sz="1200" dirty="0"/>
-              <a:t>4 ÷ 0.2 =  </a:t>
+              <a:t>4 ÷ 0,2 =  </a:t>
             </a:r>
           </a:p>
         </p:txBody>
@@ -14768,7 +14768,7 @@
             <a:pPr algn="ctr"/>
             <a:r>
               <a:rPr lang="en-GB" sz="1200" dirty="0"/>
-              <a:t>2 ÷ 0.1 =  </a:t>
+              <a:t>2 ÷ 0,1 =  </a:t>
             </a:r>
           </a:p>
         </p:txBody>
@@ -14922,7 +14922,7 @@
             <a:pPr algn="ctr"/>
             <a:r>
               <a:rPr lang="en-GB" sz="1200" dirty="0"/>
-              <a:t>5 ÷ 0.1 =  </a:t>
+              <a:t>5 ÷ 0,1 =  </a:t>
             </a:r>
           </a:p>
         </p:txBody>
@@ -15508,7 +15508,7 @@
                 <a:ea typeface="+mn-ea"/>
                 <a:cs typeface="+mn-cs"/>
               </a:rPr>
-              <a:t>9 ÷ 0.5 =  </a:t>
+              <a:t>9 ÷ 0,5 =  </a:t>
             </a:r>
           </a:p>
         </p:txBody>
@@ -15822,7 +15822,7 @@
                 <a:ea typeface="+mn-ea"/>
                 <a:cs typeface="+mn-cs"/>
               </a:rPr>
-              <a:t>6 ÷ 0.2 =  </a:t>
+              <a:t>6 ÷ 0,2 =  </a:t>
             </a:r>
           </a:p>
         </p:txBody>
@@ -15907,7 +15907,7 @@
                 <a:ea typeface="+mn-ea"/>
                 <a:cs typeface="+mn-cs"/>
               </a:rPr>
-              <a:t>2 ÷ 0.25 =  </a:t>
+              <a:t>2 ÷ 0,25 =  </a:t>
             </a:r>
           </a:p>
         </p:txBody>
@@ -15992,7 +15992,7 @@
                 <a:ea typeface="+mn-ea"/>
                 <a:cs typeface="+mn-cs"/>
               </a:rPr>
-              <a:t>14 ÷ 0.1 =  </a:t>
+              <a:t>14 ÷ 0,1 =  </a:t>
             </a:r>
           </a:p>
         </p:txBody>
@@ -16077,7 +16077,7 @@
                 <a:ea typeface="+mn-ea"/>
                 <a:cs typeface="+mn-cs"/>
               </a:rPr>
-              <a:t>5 ÷ 0.02 =  </a:t>
+              <a:t>5 ÷ 0,02 =  </a:t>
             </a:r>
           </a:p>
         </p:txBody>
@@ -16257,7 +16257,7 @@
               <a:pPr algn="ctr"/>
               <a:r>
                 <a:rPr lang="en-GB" sz="1200" dirty="0"/>
-                <a:t>2 ÷ 0.5 =  </a:t>
+                <a:t>2 ÷ 0,5 =  </a:t>
               </a:r>
             </a:p>
           </p:txBody>
@@ -16646,7 +16646,7 @@
             <a:pPr algn="ctr"/>
             <a:r>
               <a:rPr lang="en-GB" sz="1200" dirty="0"/>
-              <a:t>3 ÷ 0.5 =  </a:t>
+              <a:t>3 ÷ 0,5 =  </a:t>
             </a:r>
           </a:p>
         </p:txBody>
@@ -17120,7 +17120,7 @@
             <a:pPr algn="ctr"/>
             <a:r>
               <a:rPr lang="en-GB" sz="1200" dirty="0"/>
-              <a:t>5 ÷ 0.5 =  </a:t>
+              <a:t>5 ÷ 0,5 =  </a:t>
             </a:r>
           </a:p>
         </p:txBody>
@@ -17820,7 +17820,7 @@
             <a:pPr algn="ctr"/>
             <a:r>
               <a:rPr lang="en-GB" sz="1200" dirty="0"/>
-              <a:t>2.5 ÷ 0.5 =  </a:t>
+              <a:t>2,5 ÷ 0,5 =  </a:t>
             </a:r>
           </a:p>
         </p:txBody>
@@ -18248,7 +18248,7 @@
             <a:pPr algn="ctr"/>
             <a:r>
               <a:rPr lang="en-GB" sz="1200" dirty="0"/>
-              <a:t>0.5 ÷ 0.5 =  </a:t>
+              <a:t>0,5 ÷ 0,5 =  </a:t>
             </a:r>
           </a:p>
         </p:txBody>
@@ -18497,7 +18497,7 @@
                 <a:ea typeface="+mn-ea"/>
                 <a:cs typeface="+mn-cs"/>
               </a:rPr>
-              <a:t>7 ÷ 0.5 =  </a:t>
+              <a:t>7 ÷ 0,5 =  </a:t>
             </a:r>
           </a:p>
         </p:txBody>
@@ -18582,7 +18582,7 @@
                 <a:ea typeface="+mn-ea"/>
                 <a:cs typeface="+mn-cs"/>
               </a:rPr>
-              <a:t>20 ÷ 0.5 =  </a:t>
+              <a:t>20 ÷ 0,5 =  </a:t>
             </a:r>
           </a:p>
         </p:txBody>
@@ -18752,7 +18752,7 @@
             <a:pPr algn="ctr"/>
             <a:r>
               <a:rPr lang="en-GB" sz="1200" dirty="0"/>
-              <a:t>3 ÷ 0.2 =  </a:t>
+              <a:t>3 ÷ 0,2 =  </a:t>
             </a:r>
           </a:p>
         </p:txBody>
@@ -19764,7 +19764,7 @@
             <a:pPr algn="ctr"/>
             <a:r>
               <a:rPr lang="en-GB" sz="1200" dirty="0"/>
-              <a:t>4 ÷ 0.2 =  </a:t>
+              <a:t>4 ÷ 0,2 =  </a:t>
             </a:r>
           </a:p>
         </p:txBody>
@@ -21069,7 +21069,7 @@
             <a:pPr algn="ctr"/>
             <a:r>
               <a:rPr lang="en-GB" sz="1200" dirty="0"/>
-              <a:t>2 ÷ 0.1 =  </a:t>
+              <a:t>2 ÷ 0,1 =  </a:t>
             </a:r>
           </a:p>
         </p:txBody>
@@ -21493,7 +21493,7 @@
             <a:pPr algn="ctr"/>
             <a:r>
               <a:rPr lang="en-GB" sz="1200" dirty="0"/>
-              <a:t>5 ÷ 0.1 =  </a:t>
+              <a:t>5 ÷ 0,1 =  </a:t>
             </a:r>
           </a:p>
         </p:txBody>
@@ -23484,7 +23484,7 @@
                 <a:ea typeface="+mn-ea"/>
                 <a:cs typeface="+mn-cs"/>
               </a:rPr>
-              <a:t>9 ÷ 0.5 =  </a:t>
+              <a:t>9 ÷ 0,5 =  </a:t>
             </a:r>
           </a:p>
         </p:txBody>
@@ -23884,7 +23884,7 @@
                 <a:ea typeface="+mn-ea"/>
                 <a:cs typeface="+mn-cs"/>
               </a:rPr>
-              <a:t>6 ÷ 0.2 =  </a:t>
+              <a:t>6 ÷ 0,2 =  </a:t>
             </a:r>
           </a:p>
         </p:txBody>
@@ -24012,7 +24012,7 @@
                 <a:ea typeface="+mn-ea"/>
                 <a:cs typeface="+mn-cs"/>
               </a:rPr>
-              <a:t>2 ÷ 0.25 =  </a:t>
+              <a:t>2 ÷ 0,25 =  </a:t>
             </a:r>
           </a:p>
         </p:txBody>
@@ -24140,7 +24140,7 @@
                 <a:ea typeface="+mn-ea"/>
                 <a:cs typeface="+mn-cs"/>
               </a:rPr>
-              <a:t>14 ÷ 0.1 =  </a:t>
+              <a:t>14 ÷ 0,1 =  </a:t>
             </a:r>
           </a:p>
         </p:txBody>
@@ -24268,7 +24268,7 @@
                 <a:ea typeface="+mn-ea"/>
                 <a:cs typeface="+mn-cs"/>
               </a:rPr>
-              <a:t>5 ÷ 0.02 =  </a:t>
+              <a:t>5 ÷ 0,02 =  </a:t>
             </a:r>
           </a:p>
         </p:txBody>
@@ -24491,7 +24491,7 @@
               <a:pPr algn="ctr"/>
               <a:r>
                 <a:rPr lang="en-GB" sz="1200" dirty="0"/>
-                <a:t>2 ÷ 0.5 =  </a:t>
+                <a:t>2 ÷ 0,5 =  </a:t>
               </a:r>
             </a:p>
           </p:txBody>
@@ -24880,7 +24880,7 @@
             <a:pPr algn="ctr"/>
             <a:r>
               <a:rPr lang="en-GB" sz="1200" dirty="0"/>
-              <a:t>3 ÷ 0.5 =  </a:t>
+              <a:t>3 ÷ 0,5 =  </a:t>
             </a:r>
           </a:p>
         </p:txBody>
@@ -25217,7 +25217,7 @@
             <a:pPr algn="ctr"/>
             <a:r>
               <a:rPr lang="en-GB" sz="1200" dirty="0"/>
-              <a:t>5 ÷ 0.5 =  </a:t>
+              <a:t>5 ÷ 0,5 =  </a:t>
             </a:r>
           </a:p>
         </p:txBody>
@@ -25639,7 +25639,7 @@
             <a:pPr algn="ctr"/>
             <a:r>
               <a:rPr lang="en-GB" sz="1200" dirty="0"/>
-              <a:t>2.5 ÷ 0.5 =  </a:t>
+              <a:t>2,5 ÷ 0,5 =  </a:t>
             </a:r>
           </a:p>
         </p:txBody>
@@ -25930,7 +25930,7 @@
             <a:pPr algn="ctr"/>
             <a:r>
               <a:rPr lang="en-GB" sz="1200" dirty="0"/>
-              <a:t>0.5 ÷ 0.5 =  </a:t>
+              <a:t>0,5 ÷ 0,5 =  </a:t>
             </a:r>
           </a:p>
         </p:txBody>
@@ -26136,7 +26136,7 @@
                 <a:ea typeface="+mn-ea"/>
                 <a:cs typeface="+mn-cs"/>
               </a:rPr>
-              <a:t>7 ÷ 0.5 =  </a:t>
+              <a:t>7 ÷ 0,5 =  </a:t>
             </a:r>
           </a:p>
         </p:txBody>
@@ -26221,7 +26221,7 @@
                 <a:ea typeface="+mn-ea"/>
                 <a:cs typeface="+mn-cs"/>
               </a:rPr>
-              <a:t>20 ÷ 0.5 =  </a:t>
+              <a:t>20 ÷ 0,5 =  </a:t>
             </a:r>
           </a:p>
         </p:txBody>
@@ -26305,7 +26305,7 @@
             <a:pPr algn="ctr"/>
             <a:r>
               <a:rPr lang="en-GB" sz="1200" dirty="0"/>
-              <a:t>3 ÷ 0.2 =  </a:t>
+              <a:t>3 ÷ 0,2 =  </a:t>
             </a:r>
           </a:p>
         </p:txBody>
@@ -26596,7 +26596,7 @@
             <a:pPr algn="ctr"/>
             <a:r>
               <a:rPr lang="en-GB" sz="1200" dirty="0"/>
-              <a:t>4 ÷ 0.2 =  </a:t>
+              <a:t>4 ÷ 0,2 =  </a:t>
             </a:r>
           </a:p>
         </p:txBody>
@@ -26954,7 +26954,7 @@
             <a:pPr algn="ctr"/>
             <a:r>
               <a:rPr lang="en-GB" sz="1200" dirty="0"/>
-              <a:t>2 ÷ 0.1 =  </a:t>
+              <a:t>2 ÷ 0,1 =  </a:t>
             </a:r>
           </a:p>
         </p:txBody>
@@ -27108,7 +27108,7 @@
             <a:pPr algn="ctr"/>
             <a:r>
               <a:rPr lang="en-GB" sz="1200" dirty="0"/>
-              <a:t>5 ÷ 0.1 =  </a:t>
+              <a:t>5 ÷ 0,1 =  </a:t>
             </a:r>
           </a:p>
         </p:txBody>
@@ -27694,7 +27694,7 @@
                 <a:ea typeface="+mn-ea"/>
                 <a:cs typeface="+mn-cs"/>
               </a:rPr>
-              <a:t>9 ÷ 0.5 =  </a:t>
+              <a:t>9 ÷ 0,5 =  </a:t>
             </a:r>
           </a:p>
         </p:txBody>
@@ -28008,7 +28008,7 @@
                 <a:ea typeface="+mn-ea"/>
                 <a:cs typeface="+mn-cs"/>
               </a:rPr>
-              <a:t>6 ÷ 0.2 =  </a:t>
+              <a:t>6 ÷ 0,2 =  </a:t>
             </a:r>
           </a:p>
         </p:txBody>
@@ -28093,7 +28093,7 @@
                 <a:ea typeface="+mn-ea"/>
                 <a:cs typeface="+mn-cs"/>
               </a:rPr>
-              <a:t>2 ÷ 0.25 =  </a:t>
+              <a:t>2 ÷ 0,25 =  </a:t>
             </a:r>
           </a:p>
         </p:txBody>
@@ -28178,7 +28178,7 @@
                 <a:ea typeface="+mn-ea"/>
                 <a:cs typeface="+mn-cs"/>
               </a:rPr>
-              <a:t>14 ÷ 0.1 =  </a:t>
+              <a:t>14 ÷ 0,1 =  </a:t>
             </a:r>
           </a:p>
         </p:txBody>
@@ -28263,7 +28263,7 @@
                 <a:ea typeface="+mn-ea"/>
                 <a:cs typeface="+mn-cs"/>
               </a:rPr>
-              <a:t>5 ÷ 0.02 =  </a:t>
+              <a:t>5 ÷ 0,02 =  </a:t>
             </a:r>
           </a:p>
         </p:txBody>
@@ -28370,7 +28370,7 @@
               <a:pPr algn="ctr"/>
               <a:r>
                 <a:rPr lang="en-GB" sz="1200" dirty="0"/>
-                <a:t>2 ÷ 0.5 =  </a:t>
+                <a:t>2 ÷ 0,5 =  </a:t>
               </a:r>
             </a:p>
           </p:txBody>
@@ -28759,7 +28759,7 @@
             <a:pPr algn="ctr"/>
             <a:r>
               <a:rPr lang="en-GB" sz="1200" dirty="0"/>
-              <a:t>3 ÷ 0.5 =  </a:t>
+              <a:t>3 ÷ 0,5 =  </a:t>
             </a:r>
           </a:p>
         </p:txBody>
@@ -29096,7 +29096,7 @@
             <a:pPr algn="ctr"/>
             <a:r>
               <a:rPr lang="en-GB" sz="1200" dirty="0"/>
-              <a:t>5 ÷ 0.5 =  </a:t>
+              <a:t>5 ÷ 0,5 =  </a:t>
             </a:r>
           </a:p>
         </p:txBody>
@@ -29518,7 +29518,7 @@
             <a:pPr algn="ctr"/>
             <a:r>
               <a:rPr lang="en-GB" sz="1200" dirty="0"/>
-              <a:t>2.5 ÷ 0.5 =  </a:t>
+              <a:t>2,5 ÷ 0,5 =  </a:t>
             </a:r>
           </a:p>
         </p:txBody>
@@ -29809,7 +29809,7 @@
             <a:pPr algn="ctr"/>
             <a:r>
               <a:rPr lang="en-GB" sz="1200" dirty="0"/>
-              <a:t>0.5 ÷ 0.5 =  </a:t>
+              <a:t>0,5 ÷ 0,5 =  </a:t>
             </a:r>
           </a:p>
         </p:txBody>
@@ -30015,7 +30015,7 @@
                 <a:ea typeface="+mn-ea"/>
                 <a:cs typeface="+mn-cs"/>
               </a:rPr>
-              <a:t>7 ÷ 0.5 =  </a:t>
+              <a:t>7 ÷ 0,5 =  </a:t>
             </a:r>
           </a:p>
         </p:txBody>
@@ -30100,7 +30100,7 @@
                 <a:ea typeface="+mn-ea"/>
                 <a:cs typeface="+mn-cs"/>
               </a:rPr>
-              <a:t>20 ÷ 0.5 =  </a:t>
+              <a:t>20 ÷ 0,5 =  </a:t>
             </a:r>
           </a:p>
         </p:txBody>
@@ -30184,7 +30184,7 @@
             <a:pPr algn="ctr"/>
             <a:r>
               <a:rPr lang="en-GB" sz="1200" dirty="0"/>
-              <a:t>3 ÷ 0.2 =  </a:t>
+              <a:t>3 ÷ 0,2 =  </a:t>
             </a:r>
           </a:p>
         </p:txBody>
@@ -30475,7 +30475,7 @@
             <a:pPr algn="ctr"/>
             <a:r>
               <a:rPr lang="en-GB" sz="1200" dirty="0"/>
-              <a:t>4 ÷ 0.2 =  </a:t>
+              <a:t>4 ÷ 0,2 =  </a:t>
             </a:r>
           </a:p>
         </p:txBody>
@@ -30833,7 +30833,7 @@
             <a:pPr algn="ctr"/>
             <a:r>
               <a:rPr lang="en-GB" sz="1200" dirty="0"/>
-              <a:t>2 ÷ 0.1 =  </a:t>
+              <a:t>2 ÷ 0,1 =  </a:t>
             </a:r>
           </a:p>
         </p:txBody>
@@ -30987,7 +30987,7 @@
             <a:pPr algn="ctr"/>
             <a:r>
               <a:rPr lang="en-GB" sz="1200" dirty="0"/>
-              <a:t>5 ÷ 0.1 =  </a:t>
+              <a:t>5 ÷ 0,1 =  </a:t>
             </a:r>
           </a:p>
         </p:txBody>
@@ -31573,7 +31573,7 @@
                 <a:ea typeface="+mn-ea"/>
                 <a:cs typeface="+mn-cs"/>
               </a:rPr>
-              <a:t>9 ÷ 0.5 =  </a:t>
+              <a:t>9 ÷ 0,5 =  </a:t>
             </a:r>
           </a:p>
         </p:txBody>
@@ -31887,7 +31887,7 @@
                 <a:ea typeface="+mn-ea"/>
                 <a:cs typeface="+mn-cs"/>
               </a:rPr>
-              <a:t>6 ÷ 0.2 =  </a:t>
+              <a:t>6 ÷ 0,2 =  </a:t>
             </a:r>
           </a:p>
         </p:txBody>
@@ -31972,7 +31972,7 @@
                 <a:ea typeface="+mn-ea"/>
                 <a:cs typeface="+mn-cs"/>
               </a:rPr>
-              <a:t>2 ÷ 0.25 =  </a:t>
+              <a:t>2 ÷ 0,25 =  </a:t>
             </a:r>
           </a:p>
         </p:txBody>
@@ -32057,7 +32057,7 @@
                 <a:ea typeface="+mn-ea"/>
                 <a:cs typeface="+mn-cs"/>
               </a:rPr>
-              <a:t>14 ÷ 0.1 =  </a:t>
+              <a:t>14 ÷ 0,1 =  </a:t>
             </a:r>
           </a:p>
         </p:txBody>
@@ -32142,7 +32142,7 @@
                 <a:ea typeface="+mn-ea"/>
                 <a:cs typeface="+mn-cs"/>
               </a:rPr>
-              <a:t>5 ÷ 0.02 =  </a:t>
+              <a:t>5 ÷ 0,02 =  </a:t>
             </a:r>
           </a:p>
         </p:txBody>
